--- a/docs/final-project/gomin-presentation.pptx
+++ b/docs/final-project/gomin-presentation.pptx
@@ -10085,7 +10085,7 @@
         <p:spPr>
           <a:xfrm xmlns:a="http://schemas.openxmlformats.org/drawingml/2006/main">
             <a:off x="762000" y="2190750"/>
-            <a:ext cx="10668000" cy="1238250"/>
+            <a:ext cx="5810250" cy="1238250"/>
           </a:xfrm>
           <a:prstGeom xmlns:a="http://schemas.openxmlformats.org/drawingml/2006/main" prst="rect">
             <a:avLst/>
@@ -10243,7 +10243,7 @@
         <p:spPr>
           <a:xfrm xmlns:a="http://schemas.openxmlformats.org/drawingml/2006/main">
             <a:off x="800100" y="3724275"/>
-            <a:ext cx="10477500" cy="571500"/>
+            <a:ext cx="5810250" cy="571500"/>
           </a:xfrm>
           <a:prstGeom xmlns:a="http://schemas.openxmlformats.org/drawingml/2006/main" prst="rect">
             <a:avLst/>
@@ -10401,7 +10401,7 @@
         <p:spPr>
           <a:xfrm xmlns:a="http://schemas.openxmlformats.org/drawingml/2006/main">
             <a:off x="819150" y="5334000"/>
-            <a:ext cx="10477500" cy="476250"/>
+            <a:ext cx="5810250" cy="476250"/>
           </a:xfrm>
           <a:prstGeom xmlns:a="http://schemas.openxmlformats.org/drawingml/2006/main" prst="rect">
             <a:avLst/>
@@ -10542,6 +10542,34 @@
           </a:p>
         </p:txBody>
       </p:sp>
+      <p:pic>
+        <p:nvPicPr>
+          <p:cNvPr id="5" name="모리 서비스 QR">
+            <a:extLst xmlns:a="http://schemas.openxmlformats.org/drawingml/2006/main">
+              <a:ext uri="{FF2B5EF4-FFF2-40B4-BE49-F238E27FC236}">
+                <a16:creationId xmlns:a16="http://schemas.microsoft.com/office/drawing/2014/main" id="{281D6FEF-7C4C-4F2B-9CFD-6A671E73471F}"/>
+              </a:ext>
+            </a:extLst>
+          </p:cNvPr>
+          <p:cNvPicPr>
+            <a:picLocks xmlns:a="http://schemas.openxmlformats.org/drawingml/2006/main" noChangeAspect="1"/>
+          </p:cNvPicPr>
+          <p:nvPr/>
+        </p:nvPicPr>
+        <p:blipFill>
+          <a:blip xmlns:r="http://schemas.openxmlformats.org/officeDocument/2006/relationships" xmlns:a="http://schemas.openxmlformats.org/drawingml/2006/main" r:embed="rIdMoriQr"/>
+          <a:stretch xmlns:a="http://schemas.openxmlformats.org/drawingml/2006/main"/>
+        </p:blipFill>
+        <p:spPr>
+          <a:xfrm xmlns:a="http://schemas.openxmlformats.org/drawingml/2006/main">
+            <a:off x="7715250" y="2076450"/>
+            <a:ext cx="3048000" cy="3048000"/>
+          </a:xfrm>
+          <a:prstGeom xmlns:a="http://schemas.openxmlformats.org/drawingml/2006/main" prst="rect">
+            <a:avLst/>
+          </a:prstGeom>
+        </p:spPr>
+      </p:pic>
     </p:spTree>
     <p:extLst>
       <p:ext uri="{BB962C8B-B14F-4D97-AF65-F5344CB8AC3E}">

--- a/docs/final-project/gomin-presentation.pptx
+++ b/docs/final-project/gomin-presentation.pptx
@@ -449,7 +449,7 @@
           <a:lstStyle xmlns:a="http://schemas.openxmlformats.org/drawingml/2006/main"/>
           <a:p xmlns:a="http://schemas.openxmlformats.org/drawingml/2006/main">
             <a:r>
-              <a:t>Source: docs/final-project/references/overview.md; local service screenshot: clean-screenshots/01-home.jpg</a:t>
+              <a:t/>
             </a:r>
           </a:p>
         </p:txBody>
@@ -519,7 +519,7 @@
           <a:lstStyle xmlns:a="http://schemas.openxmlformats.org/drawingml/2006/main"/>
           <a:p xmlns:a="http://schemas.openxmlformats.org/drawingml/2006/main">
             <a:r>
-              <a:t>Source: user-provided planning intent, 2026-10-19. Original AI-generated illustration of a hypothetical teenager, parents, friend and teacher. The adults are caring, not hostile. This is an illustrative scene, not interview evidence or a claim about all teenagers.</a:t>
+              <a:t/>
             </a:r>
           </a:p>
         </p:txBody>
@@ -589,7 +589,7 @@
           <a:lstStyle xmlns:a="http://schemas.openxmlformats.org/drawingml/2006/main"/>
           <a:p xmlns:a="http://schemas.openxmlformats.org/drawingml/2006/main">
             <a:r>
-              <a:t>Sources: user-approved planning intent, 2026-10-19; docs/final-project/proposal.md. The same hypothetical teenager now talks with Mori. The concise summary is illustrative presentation copy based on the demo concern, not a verbatim user quote. Diary image is a crop of the actual local service result, AI badge preserved. Summary then diary are native click-to-appear groups.</a:t>
+              <a:t/>
             </a:r>
           </a:p>
         </p:txBody>
@@ -659,7 +659,7 @@
           <a:lstStyle xmlns:a="http://schemas.openxmlformats.org/drawingml/2006/main"/>
           <a:p xmlns:a="http://schemas.openxmlformats.org/drawingml/2006/main">
             <a:r>
-              <a:t>Source: output/playwright/demo-video-2026-10-18/gomin-service-demo-mobile-ai.mp4. Embedded local H.264 MP4, 52.25 seconds.</a:t>
+              <a:t/>
             </a:r>
           </a:p>
         </p:txBody>
@@ -729,7 +729,7 @@
           <a:lstStyle xmlns:a="http://schemas.openxmlformats.org/drawingml/2006/main"/>
           <a:p xmlns:a="http://schemas.openxmlformats.org/drawingml/2006/main">
             <a:r>
-              <a:t>Sources: docs/final-project/proposal.md; docs/final-project/requirements/architecture.md. Long-term Memory refers to storing and reloading the same conversation, not cross-conversation preference memory.</a:t>
+              <a:t/>
             </a:r>
           </a:p>
         </p:txBody>
@@ -799,7 +799,7 @@
           <a:lstStyle xmlns:a="http://schemas.openxmlformats.org/drawingml/2006/main"/>
           <a:p xmlns:a="http://schemas.openxmlformats.org/drawingml/2006/main">
             <a:r>
-              <a:t>Source: docs/final-project/technology-selection.md. Reasons reflect team experience and selection-time judgment. Gemini cost was considered within models reviewed at the time; Next.js answer quality was expected, not quantitatively measured.</a:t>
+              <a:t/>
             </a:r>
           </a:p>
         </p:txBody>
@@ -869,7 +869,7 @@
           <a:lstStyle xmlns:a="http://schemas.openxmlformats.org/drawingml/2006/main"/>
           <a:p xmlns:a="http://schemas.openxmlformats.org/drawingml/2006/main">
             <a:r>
-              <a:t>Source: docs/final-project/references/user-testing.md. Five actual users used deployed service and gave in-person feedback; participants differed from the target users. Seven feedback items, five documented improvements. Menu-name and keyboard-accessibility feedback excluded from implemented rows. No post-change satisfaction/quality measurement is claimed.</a:t>
+              <a:t/>
             </a:r>
           </a:p>
         </p:txBody>
@@ -939,7 +939,7 @@
           <a:lstStyle xmlns:a="http://schemas.openxmlformats.org/drawingml/2006/main"/>
           <a:p xmlns:a="http://schemas.openxmlformats.org/drawingml/2006/main">
             <a:r>
-              <a:t>Service: https://www.gomin.today</a:t>
+              <a:t/>
             </a:r>
           </a:p>
         </p:txBody>
